--- a/documentation/TransportSense_PFL.pptx
+++ b/documentation/TransportSense_PFL.pptx
@@ -5,7 +5,7 @@
     <p:sldMasterId id="2147483648" r:id="rId1"/>
   </p:sldMasterIdLst>
   <p:notesMasterIdLst>
-    <p:notesMasterId r:id="rId15"/>
+    <p:notesMasterId r:id="rId14"/>
   </p:notesMasterIdLst>
   <p:sldIdLst>
     <p:sldId id="256" r:id="rId2"/>
@@ -14,13 +14,12 @@
     <p:sldId id="259" r:id="rId5"/>
     <p:sldId id="260" r:id="rId6"/>
     <p:sldId id="261" r:id="rId7"/>
-    <p:sldId id="262" r:id="rId8"/>
-    <p:sldId id="263" r:id="rId9"/>
+    <p:sldId id="263" r:id="rId8"/>
+    <p:sldId id="266" r:id="rId9"/>
     <p:sldId id="264" r:id="rId10"/>
     <p:sldId id="265" r:id="rId11"/>
-    <p:sldId id="266" r:id="rId12"/>
-    <p:sldId id="267" r:id="rId13"/>
-    <p:sldId id="268" r:id="rId14"/>
+    <p:sldId id="267" r:id="rId12"/>
+    <p:sldId id="268" r:id="rId13"/>
   </p:sldIdLst>
   <p:sldSz cx="9144000" cy="5143500" type="screen16x9"/>
   <p:notesSz cx="5143500" cy="9144000"/>
@@ -585,90 +584,6 @@
 </p:notes>
 </file>
 
-<file path=ppt/notesSlides/notesSlide13.xml><?xml version="1.0" encoding="utf-8"?>
-<p:notes xmlns:a="http://schemas.openxmlformats.org/drawingml/2006/main" xmlns:r="http://schemas.openxmlformats.org/officeDocument/2006/relationships" xmlns:p="http://schemas.openxmlformats.org/presentationml/2006/main">
-  <p:cSld>
-    <p:spTree>
-      <p:nvGrpSpPr>
-        <p:cNvPr id="1" name=""/>
-        <p:cNvGrpSpPr/>
-        <p:nvPr/>
-      </p:nvGrpSpPr>
-      <p:grpSpPr>
-        <a:xfrm>
-          <a:off x="0" y="0"/>
-          <a:ext cx="0" cy="0"/>
-          <a:chOff x="0" y="0"/>
-          <a:chExt cx="0" cy="0"/>
-        </a:xfrm>
-      </p:grpSpPr>
-      <p:sp>
-        <p:nvSpPr>
-          <p:cNvPr id="2" name="Slide Image Placeholder 1"/>
-          <p:cNvSpPr>
-            <a:spLocks noGrp="1" noRot="1" noChangeAspect="1"/>
-          </p:cNvSpPr>
-          <p:nvPr>
-            <p:ph type="sldImg"/>
-          </p:nvPr>
-        </p:nvSpPr>
-        <p:spPr/>
-      </p:sp>
-      <p:sp>
-        <p:nvSpPr>
-          <p:cNvPr id="3" name="Notes Placeholder 2"/>
-          <p:cNvSpPr>
-            <a:spLocks noGrp="1"/>
-          </p:cNvSpPr>
-          <p:nvPr>
-            <p:ph type="body" idx="1"/>
-          </p:nvPr>
-        </p:nvSpPr>
-        <p:spPr/>
-        <p:txBody>
-          <a:bodyPr/>
-          <a:lstStyle/>
-          <a:p>
-            <a:endParaRPr lang="en-US" dirty="0"/>
-          </a:p>
-        </p:txBody>
-      </p:sp>
-      <p:sp>
-        <p:nvSpPr>
-          <p:cNvPr id="4" name="Slide Number Placeholder 3"/>
-          <p:cNvSpPr>
-            <a:spLocks noGrp="1"/>
-          </p:cNvSpPr>
-          <p:nvPr>
-            <p:ph type="sldNum" sz="quarter" idx="10"/>
-          </p:nvPr>
-        </p:nvSpPr>
-        <p:spPr/>
-        <p:txBody>
-          <a:bodyPr/>
-          <a:lstStyle/>
-          <a:p>
-            <a:fld id="{F7021451-1387-4CA6-816F-3879F97B5CBC}" type="slidenum">
-              <a:rPr lang="en-US"/>
-              <a:t>13</a:t>
-            </a:fld>
-            <a:endParaRPr lang="en-US"/>
-          </a:p>
-        </p:txBody>
-      </p:sp>
-    </p:spTree>
-    <p:extLst>
-      <p:ext uri="{BB962C8B-B14F-4D97-AF65-F5344CB8AC3E}">
-        <p14:creationId xmlns:p14="http://schemas.microsoft.com/office/powerpoint/2010/main" val="1024086991"/>
-      </p:ext>
-    </p:extLst>
-  </p:cSld>
-  <p:clrMapOvr>
-    <a:masterClrMapping/>
-  </p:clrMapOvr>
-</p:notes>
-</file>
-
 <file path=ppt/notesSlides/notesSlide2.xml><?xml version="1.0" encoding="utf-8"?>
 <p:notes xmlns:a="http://schemas.openxmlformats.org/drawingml/2006/main" xmlns:r="http://schemas.openxmlformats.org/officeDocument/2006/relationships" xmlns:p="http://schemas.openxmlformats.org/presentationml/2006/main">
   <p:cSld>
@@ -3223,394 +3138,6 @@
 
 <file path=ppt/slides/slide11.xml><?xml version="1.0" encoding="utf-8"?>
 <p:sld xmlns:a="http://schemas.openxmlformats.org/drawingml/2006/main" xmlns:r="http://schemas.openxmlformats.org/officeDocument/2006/relationships" xmlns:p="http://schemas.openxmlformats.org/presentationml/2006/main">
-  <p:cSld name="Slide 11">
-    <p:bg>
-      <p:bgPr>
-        <a:solidFill>
-          <a:srgbClr val="050814"/>
-        </a:solidFill>
-        <a:effectLst/>
-      </p:bgPr>
-    </p:bg>
-    <p:spTree>
-      <p:nvGrpSpPr>
-        <p:cNvPr id="1" name=""/>
-        <p:cNvGrpSpPr/>
-        <p:nvPr/>
-      </p:nvGrpSpPr>
-      <p:grpSpPr>
-        <a:xfrm>
-          <a:off x="0" y="0"/>
-          <a:ext cx="0" cy="0"/>
-          <a:chOff x="0" y="0"/>
-          <a:chExt cx="0" cy="0"/>
-        </a:xfrm>
-      </p:grpSpPr>
-      <p:sp>
-        <p:nvSpPr>
-          <p:cNvPr id="2" name="Shape 0"/>
-          <p:cNvSpPr/>
-          <p:nvPr/>
-        </p:nvSpPr>
-        <p:spPr>
-          <a:xfrm>
-            <a:off x="-914400" y="3200400"/>
-            <a:ext cx="4572000" cy="3200400"/>
-          </a:xfrm>
-          <a:prstGeom prst="ellipse">
-            <a:avLst/>
-          </a:prstGeom>
-          <a:solidFill>
-            <a:srgbClr val="4C1D95">
-              <a:alpha val="25000"/>
-            </a:srgbClr>
-          </a:solidFill>
-          <a:ln w="12700">
-            <a:solidFill>
-              <a:srgbClr val="4C1D95">
-                <a:alpha val="0"/>
-              </a:srgbClr>
-            </a:solidFill>
-            <a:prstDash val="solid"/>
-          </a:ln>
-        </p:spPr>
-      </p:sp>
-      <p:sp>
-        <p:nvSpPr>
-          <p:cNvPr id="3" name="Shape 1"/>
-          <p:cNvSpPr/>
-          <p:nvPr/>
-        </p:nvSpPr>
-        <p:spPr>
-          <a:xfrm>
-            <a:off x="6858000" y="2743200"/>
-            <a:ext cx="3657600" cy="2743200"/>
-          </a:xfrm>
-          <a:prstGeom prst="ellipse">
-            <a:avLst/>
-          </a:prstGeom>
-          <a:solidFill>
-            <a:srgbClr val="1E1B4B">
-              <a:alpha val="40000"/>
-            </a:srgbClr>
-          </a:solidFill>
-          <a:ln w="12700">
-            <a:solidFill>
-              <a:srgbClr val="1E1B4B">
-                <a:alpha val="0"/>
-              </a:srgbClr>
-            </a:solidFill>
-            <a:prstDash val="solid"/>
-          </a:ln>
-        </p:spPr>
-      </p:sp>
-      <p:sp>
-        <p:nvSpPr>
-          <p:cNvPr id="4" name="Text 2"/>
-          <p:cNvSpPr/>
-          <p:nvPr/>
-        </p:nvSpPr>
-        <p:spPr>
-          <a:xfrm>
-            <a:off x="8503920" y="137160"/>
-            <a:ext cx="457200" cy="457200"/>
-          </a:xfrm>
-          <a:prstGeom prst="rect">
-            <a:avLst/>
-          </a:prstGeom>
-          <a:noFill/>
-          <a:ln/>
-        </p:spPr>
-        <p:txBody>
-          <a:bodyPr wrap="square" rtlCol="0" anchor="ctr"/>
-          <a:lstStyle/>
-          <a:p>
-            <a:pPr marL="0" indent="0" algn="ctr">
-              <a:buNone/>
-            </a:pPr>
-            <a:r>
-              <a:rPr lang="en-US" sz="1800" b="1" dirty="0">
-                <a:solidFill>
-                  <a:srgbClr val="FFFFFF"/>
-                </a:solidFill>
-              </a:rPr>
-              <a:t>✦</a:t>
-            </a:r>
-            <a:endParaRPr lang="en-US" sz="1800" dirty="0"/>
-          </a:p>
-        </p:txBody>
-      </p:sp>
-      <p:sp>
-        <p:nvSpPr>
-          <p:cNvPr id="5" name="Text 3"/>
-          <p:cNvSpPr/>
-          <p:nvPr/>
-        </p:nvSpPr>
-        <p:spPr>
-          <a:xfrm>
-            <a:off x="411480" y="201168"/>
-            <a:ext cx="8046720" cy="640080"/>
-          </a:xfrm>
-          <a:prstGeom prst="rect">
-            <a:avLst/>
-          </a:prstGeom>
-          <a:noFill/>
-          <a:ln/>
-        </p:spPr>
-        <p:txBody>
-          <a:bodyPr wrap="square" lIns="0" tIns="0" rIns="0" bIns="0" rtlCol="0" anchor="ctr"/>
-          <a:lstStyle/>
-          <a:p>
-            <a:pPr marL="0" indent="0" algn="l">
-              <a:buNone/>
-            </a:pPr>
-            <a:r>
-              <a:rPr lang="en-US" sz="3200" b="1" dirty="0">
-                <a:solidFill>
-                  <a:srgbClr val="A78BFA"/>
-                </a:solidFill>
-                <a:latin typeface="Calibri" pitchFamily="34" charset="0"/>
-                <a:ea typeface="Calibri" pitchFamily="34" charset="-122"/>
-                <a:cs typeface="Calibri" pitchFamily="34" charset="-120"/>
-              </a:rPr>
-              <a:t>Contributions</a:t>
-            </a:r>
-            <a:endParaRPr lang="en-US" sz="3200" dirty="0"/>
-          </a:p>
-        </p:txBody>
-      </p:sp>
-      <p:sp>
-        <p:nvSpPr>
-          <p:cNvPr id="6" name="Shape 4"/>
-          <p:cNvSpPr/>
-          <p:nvPr/>
-        </p:nvSpPr>
-        <p:spPr>
-          <a:xfrm>
-            <a:off x="411480" y="841248"/>
-            <a:ext cx="2286000" cy="36576"/>
-          </a:xfrm>
-          <a:prstGeom prst="rect">
-            <a:avLst/>
-          </a:prstGeom>
-          <a:solidFill>
-            <a:srgbClr val="7C3AED">
-              <a:alpha val="60000"/>
-            </a:srgbClr>
-          </a:solidFill>
-          <a:ln w="12700">
-            <a:solidFill>
-              <a:srgbClr val="7C3AED">
-                <a:alpha val="0"/>
-              </a:srgbClr>
-            </a:solidFill>
-            <a:prstDash val="solid"/>
-          </a:ln>
-        </p:spPr>
-      </p:sp>
-      <p:sp>
-        <p:nvSpPr>
-          <p:cNvPr id="7" name="Text 5"/>
-          <p:cNvSpPr/>
-          <p:nvPr/>
-        </p:nvSpPr>
-        <p:spPr>
-          <a:xfrm>
-            <a:off x="411480" y="1005840"/>
-            <a:ext cx="8321040" cy="3931920"/>
-          </a:xfrm>
-          <a:prstGeom prst="rect">
-            <a:avLst/>
-          </a:prstGeom>
-          <a:noFill/>
-          <a:ln/>
-        </p:spPr>
-        <p:txBody>
-          <a:bodyPr wrap="square" lIns="0" tIns="0" rIns="0" bIns="0" rtlCol="0" anchor="t"/>
-          <a:lstStyle/>
-          <a:p>
-            <a:pPr marL="342900" indent="-342900">
-              <a:buSzPct val="100000"/>
-              <a:buChar char="•"/>
-            </a:pPr>
-            <a:endParaRPr lang="en-US" sz="1350" b="1" dirty="0">
-              <a:solidFill>
-                <a:srgbClr val="C4B5FD"/>
-              </a:solidFill>
-              <a:latin typeface="Calibri" pitchFamily="34" charset="0"/>
-              <a:ea typeface="Calibri" pitchFamily="34" charset="-122"/>
-              <a:cs typeface="Calibri" pitchFamily="34" charset="-120"/>
-            </a:endParaRPr>
-          </a:p>
-          <a:p>
-            <a:pPr marL="342900" indent="-342900">
-              <a:buSzPct val="100000"/>
-              <a:buChar char="•"/>
-            </a:pPr>
-            <a:r>
-              <a:rPr lang="en-US" sz="1350" b="1" dirty="0">
-                <a:solidFill>
-                  <a:srgbClr val="C4B5FD"/>
-                </a:solidFill>
-                <a:latin typeface="Calibri" pitchFamily="34" charset="0"/>
-                <a:ea typeface="Calibri" pitchFamily="34" charset="-122"/>
-                <a:cs typeface="Calibri" pitchFamily="34" charset="-120"/>
-              </a:rPr>
-              <a:t>Haskell Backend: </a:t>
-            </a:r>
-            <a:r>
-              <a:rPr lang="en-US" sz="1350" dirty="0">
-                <a:solidFill>
-                  <a:srgbClr val="FFFFFF"/>
-                </a:solidFill>
-                <a:latin typeface="Calibri" pitchFamily="34" charset="0"/>
-                <a:ea typeface="Calibri" pitchFamily="34" charset="-122"/>
-                <a:cs typeface="Calibri" pitchFamily="34" charset="-120"/>
-              </a:rPr>
-              <a:t>18 source modules (~35,000+ bytes) of pure functional code — HOFs, ADTs, pattern matching, guards for composable emission modeling.</a:t>
-            </a:r>
-            <a:endParaRPr lang="en-US" sz="1350" dirty="0"/>
-          </a:p>
-          <a:p>
-            <a:pPr marL="342900" indent="-342900">
-              <a:buSzPct val="100000"/>
-              <a:buChar char="•"/>
-            </a:pPr>
-            <a:r>
-              <a:rPr lang="en-US" sz="1350" b="1" dirty="0">
-                <a:solidFill>
-                  <a:srgbClr val="C4B5FD"/>
-                </a:solidFill>
-                <a:latin typeface="Calibri" pitchFamily="34" charset="0"/>
-                <a:ea typeface="Calibri" pitchFamily="34" charset="-122"/>
-                <a:cs typeface="Calibri" pitchFamily="34" charset="-120"/>
-              </a:rPr>
-              <a:t>Global Dashboard: </a:t>
-            </a:r>
-            <a:r>
-              <a:rPr lang="en-US" sz="1350" dirty="0">
-                <a:solidFill>
-                  <a:srgbClr val="FFFFFF"/>
-                </a:solidFill>
-                <a:latin typeface="Calibri" pitchFamily="34" charset="0"/>
-                <a:ea typeface="Calibri" pitchFamily="34" charset="-122"/>
-                <a:cs typeface="Calibri" pitchFamily="34" charset="-120"/>
-              </a:rPr>
-              <a:t>196 countries × 16 years · 8 interactive pages · 20+ Chart.js visualizations · theme-aware adaptive color rendering.</a:t>
-            </a:r>
-            <a:endParaRPr lang="en-US" sz="1350" dirty="0"/>
-          </a:p>
-          <a:p>
-            <a:pPr marL="342900" indent="-342900">
-              <a:buSzPct val="100000"/>
-              <a:buChar char="•"/>
-            </a:pPr>
-            <a:r>
-              <a:rPr lang="en-US" sz="1350" b="1" dirty="0">
-                <a:solidFill>
-                  <a:srgbClr val="C4B5FD"/>
-                </a:solidFill>
-                <a:latin typeface="Calibri" pitchFamily="34" charset="0"/>
-                <a:ea typeface="Calibri" pitchFamily="34" charset="-122"/>
-                <a:cs typeface="Calibri" pitchFamily="34" charset="-120"/>
-              </a:rPr>
-              <a:t>Policy Simulation: </a:t>
-            </a:r>
-            <a:r>
-              <a:rPr lang="en-US" sz="1350" dirty="0">
-                <a:solidFill>
-                  <a:srgbClr val="FFFFFF"/>
-                </a:solidFill>
-                <a:latin typeface="Calibri" pitchFamily="34" charset="0"/>
-                <a:ea typeface="Calibri" pitchFamily="34" charset="-122"/>
-                <a:cs typeface="Calibri" pitchFamily="34" charset="-120"/>
-              </a:rPr>
-              <a:t>5 scenarios (Rail Push, EV Transition, Active Mobility, Bus Rapid Transit, Zero Car City) with automated CO₂ reduction calculation.</a:t>
-            </a:r>
-            <a:endParaRPr lang="en-US" sz="1350" dirty="0"/>
-          </a:p>
-          <a:p>
-            <a:pPr marL="342900" indent="-342900">
-              <a:buSzPct val="100000"/>
-              <a:buChar char="•"/>
-            </a:pPr>
-            <a:r>
-              <a:rPr lang="en-US" sz="1350" b="1" dirty="0">
-                <a:solidFill>
-                  <a:srgbClr val="C4B5FD"/>
-                </a:solidFill>
-                <a:latin typeface="Calibri" pitchFamily="34" charset="0"/>
-                <a:ea typeface="Calibri" pitchFamily="34" charset="-122"/>
-                <a:cs typeface="Calibri" pitchFamily="34" charset="-120"/>
-              </a:rPr>
-              <a:t>Context-Grounded AI: </a:t>
-            </a:r>
-            <a:r>
-              <a:rPr lang="en-US" sz="1350" dirty="0">
-                <a:solidFill>
-                  <a:srgbClr val="FFFFFF"/>
-                </a:solidFill>
-                <a:latin typeface="Calibri" pitchFamily="34" charset="0"/>
-                <a:ea typeface="Calibri" pitchFamily="34" charset="-122"/>
-                <a:cs typeface="Calibri" pitchFamily="34" charset="-120"/>
-              </a:rPr>
-              <a:t>Compressed dataset payload injected into Llama 3.1 system prompt — ensuring zero-hallucination, data-specific chatbot responses.</a:t>
-            </a:r>
-            <a:endParaRPr lang="en-US" sz="1350" dirty="0"/>
-          </a:p>
-          <a:p>
-            <a:pPr marL="342900" indent="-342900">
-              <a:buSzPct val="100000"/>
-              <a:buChar char="•"/>
-            </a:pPr>
-            <a:r>
-              <a:rPr lang="en-US" sz="1350" b="1" dirty="0">
-                <a:solidFill>
-                  <a:srgbClr val="C4B5FD"/>
-                </a:solidFill>
-                <a:latin typeface="Calibri" pitchFamily="34" charset="0"/>
-                <a:ea typeface="Calibri" pitchFamily="34" charset="-122"/>
-                <a:cs typeface="Calibri" pitchFamily="34" charset="-120"/>
-              </a:rPr>
-              <a:t>Custom Forecasting + Import: </a:t>
-            </a:r>
-            <a:r>
-              <a:rPr lang="en-US" sz="1350" dirty="0">
-                <a:solidFill>
-                  <a:srgbClr val="FFFFFF"/>
-                </a:solidFill>
-                <a:latin typeface="Calibri" pitchFamily="34" charset="0"/>
-                <a:ea typeface="Calibri" pitchFamily="34" charset="-122"/>
-                <a:cs typeface="Calibri" pitchFamily="34" charset="-120"/>
-              </a:rPr>
-              <a:t>From-scratch linear regression engine (trends to 2035) and drag-and-drop dataset importer with CSV-to-JSON converter.</a:t>
-            </a:r>
-            <a:endParaRPr lang="en-US" sz="1350" dirty="0"/>
-          </a:p>
-        </p:txBody>
-      </p:sp>
-    </p:spTree>
-  </p:cSld>
-  <p:clrMapOvr>
-    <a:masterClrMapping/>
-  </p:clrMapOvr>
-  <mc:AlternateContent xmlns:mc="http://schemas.openxmlformats.org/markup-compatibility/2006" xmlns:p14="http://schemas.microsoft.com/office/powerpoint/2010/main">
-    <mc:Choice Requires="p14">
-      <p:transition spd="med" p14:dur="700">
-        <p:fade/>
-      </p:transition>
-    </mc:Choice>
-    <mc:Fallback xmlns="">
-      <p:transition spd="med">
-        <p:fade/>
-      </p:transition>
-    </mc:Fallback>
-  </mc:AlternateContent>
-</p:sld>
-</file>
-
-<file path=ppt/slides/slide12.xml><?xml version="1.0" encoding="utf-8"?>
-<p:sld xmlns:a="http://schemas.openxmlformats.org/drawingml/2006/main" xmlns:r="http://schemas.openxmlformats.org/officeDocument/2006/relationships" xmlns:p="http://schemas.openxmlformats.org/presentationml/2006/main">
   <p:cSld name="Slide 12">
     <p:bg>
       <p:bgPr>
@@ -3981,7 +3508,7 @@
 </p:sld>
 </file>
 
-<file path=ppt/slides/slide13.xml><?xml version="1.0" encoding="utf-8"?>
+<file path=ppt/slides/slide12.xml><?xml version="1.0" encoding="utf-8"?>
 <p:sld xmlns:a="http://schemas.openxmlformats.org/drawingml/2006/main" xmlns:r="http://schemas.openxmlformats.org/officeDocument/2006/relationships" xmlns:p="http://schemas.openxmlformats.org/presentationml/2006/main">
   <p:cSld name="Slide 13">
     <p:bg>
@@ -6129,9 +5656,8 @@
                 <a:ea typeface="Calibri" pitchFamily="34" charset="-122"/>
                 <a:cs typeface="Calibri" pitchFamily="34" charset="-120"/>
               </a:rPr>
-              <a:t>[2] IEA (2023) — CO₂ Emissions in 2023: Global analysis of sector emission trends; transport identified as the hardest-to-abate energy end-use sector.</a:t>
-            </a:r>
-            <a:endParaRPr lang="en-US" sz="1350" dirty="0"/>
+              <a:t>[2] Brand et al. (2021) — Road to zero: Modeled future transport scenarios using policy simulation and linear trend extrapolation.</a:t>
+            </a:r>
           </a:p>
           <a:p>
             <a:pPr marL="342900" indent="-342900">
@@ -6150,7 +5676,7 @@
                 <a:ea typeface="Calibri" pitchFamily="34" charset="-122"/>
                 <a:cs typeface="Calibri" pitchFamily="34" charset="-120"/>
               </a:rPr>
-              <a:t>[3] Rodrigue (2020) — The Geography of Transport Systems: Foundational textbook on modal split analysis and transport sustainability metrics.</a:t>
+              <a:t>[3] O'Sullivan et al. (2008) — Real World Haskell: Showed practical Haskell applications for data parsing, IO handling, and modular program design.</a:t>
             </a:r>
             <a:endParaRPr lang="en-US" sz="1350" dirty="0"/>
           </a:p>
@@ -6171,8 +5697,50 @@
                 <a:ea typeface="Calibri" pitchFamily="34" charset="-122"/>
                 <a:cs typeface="Calibri" pitchFamily="34" charset="-120"/>
               </a:rPr>
-              <a:t>[4] Brand et al. (2021) — Road to zero: Modeled future transport scenarios using policy simulation and linear trend extrapolation.</a:t>
-            </a:r>
+              <a:t>[4] Pollet et al. (2019) — Dashboard Design for Climate Data: Studied effective visualization strategies for emission data using interactive charts.</a:t>
+            </a:r>
+            <a:endParaRPr lang="en-US" sz="1350" dirty="0"/>
+          </a:p>
+          <a:p>
+            <a:pPr marL="342900" indent="-342900">
+              <a:spcAft>
+                <a:spcPts val="1000"/>
+              </a:spcAft>
+              <a:buSzPct val="100000"/>
+              <a:buChar char="•"/>
+            </a:pPr>
+            <a:r>
+              <a:rPr lang="en-US" sz="1350">
+                <a:solidFill>
+                  <a:srgbClr val="FFFFFF"/>
+                </a:solidFill>
+                <a:latin typeface="Calibri" pitchFamily="34" charset="0"/>
+                <a:ea typeface="Calibri" pitchFamily="34" charset="-122"/>
+                <a:cs typeface="Calibri" pitchFamily="34" charset="-120"/>
+              </a:rPr>
+              <a:t>[5] </a:t>
+            </a:r>
+            <a:r>
+              <a:rPr lang="en-US" sz="1350" dirty="0">
+                <a:solidFill>
+                  <a:srgbClr val="FFFFFF"/>
+                </a:solidFill>
+                <a:latin typeface="Calibri" pitchFamily="34" charset="0"/>
+                <a:ea typeface="Calibri" pitchFamily="34" charset="-122"/>
+                <a:cs typeface="Calibri" pitchFamily="34" charset="-120"/>
+              </a:rPr>
+              <a:t>Meta AI (2024) — Llama 3: Open Foundation Models: Introduced the Llama 3 LLM architecture used for context-grounded conversational AI in analytics systems.</a:t>
+            </a:r>
+            <a:endParaRPr lang="en-US" sz="1350" dirty="0"/>
+          </a:p>
+          <a:p>
+            <a:pPr marL="342900" indent="-342900">
+              <a:spcAft>
+                <a:spcPts val="1000"/>
+              </a:spcAft>
+              <a:buSzPct val="100000"/>
+              <a:buChar char="•"/>
+            </a:pPr>
             <a:endParaRPr lang="en-US" sz="1350" dirty="0"/>
           </a:p>
         </p:txBody>
@@ -6198,336 +5766,6 @@
 </file>
 
 <file path=ppt/slides/slide7.xml><?xml version="1.0" encoding="utf-8"?>
-<p:sld xmlns:a="http://schemas.openxmlformats.org/drawingml/2006/main" xmlns:r="http://schemas.openxmlformats.org/officeDocument/2006/relationships" xmlns:p="http://schemas.openxmlformats.org/presentationml/2006/main">
-  <p:cSld name="Slide 7">
-    <p:bg>
-      <p:bgPr>
-        <a:solidFill>
-          <a:srgbClr val="050814"/>
-        </a:solidFill>
-        <a:effectLst/>
-      </p:bgPr>
-    </p:bg>
-    <p:spTree>
-      <p:nvGrpSpPr>
-        <p:cNvPr id="1" name=""/>
-        <p:cNvGrpSpPr/>
-        <p:nvPr/>
-      </p:nvGrpSpPr>
-      <p:grpSpPr>
-        <a:xfrm>
-          <a:off x="0" y="0"/>
-          <a:ext cx="0" cy="0"/>
-          <a:chOff x="0" y="0"/>
-          <a:chExt cx="0" cy="0"/>
-        </a:xfrm>
-      </p:grpSpPr>
-      <p:sp>
-        <p:nvSpPr>
-          <p:cNvPr id="2" name="Shape 0"/>
-          <p:cNvSpPr/>
-          <p:nvPr/>
-        </p:nvSpPr>
-        <p:spPr>
-          <a:xfrm>
-            <a:off x="-914400" y="3200400"/>
-            <a:ext cx="4572000" cy="3200400"/>
-          </a:xfrm>
-          <a:prstGeom prst="ellipse">
-            <a:avLst/>
-          </a:prstGeom>
-          <a:solidFill>
-            <a:srgbClr val="4C1D95">
-              <a:alpha val="25000"/>
-            </a:srgbClr>
-          </a:solidFill>
-          <a:ln w="12700">
-            <a:solidFill>
-              <a:srgbClr val="4C1D95">
-                <a:alpha val="0"/>
-              </a:srgbClr>
-            </a:solidFill>
-            <a:prstDash val="solid"/>
-          </a:ln>
-        </p:spPr>
-      </p:sp>
-      <p:sp>
-        <p:nvSpPr>
-          <p:cNvPr id="3" name="Shape 1"/>
-          <p:cNvSpPr/>
-          <p:nvPr/>
-        </p:nvSpPr>
-        <p:spPr>
-          <a:xfrm>
-            <a:off x="6858000" y="2743200"/>
-            <a:ext cx="3657600" cy="2743200"/>
-          </a:xfrm>
-          <a:prstGeom prst="ellipse">
-            <a:avLst/>
-          </a:prstGeom>
-          <a:solidFill>
-            <a:srgbClr val="1E1B4B">
-              <a:alpha val="40000"/>
-            </a:srgbClr>
-          </a:solidFill>
-          <a:ln w="12700">
-            <a:solidFill>
-              <a:srgbClr val="1E1B4B">
-                <a:alpha val="0"/>
-              </a:srgbClr>
-            </a:solidFill>
-            <a:prstDash val="solid"/>
-          </a:ln>
-        </p:spPr>
-      </p:sp>
-      <p:sp>
-        <p:nvSpPr>
-          <p:cNvPr id="4" name="Text 2"/>
-          <p:cNvSpPr/>
-          <p:nvPr/>
-        </p:nvSpPr>
-        <p:spPr>
-          <a:xfrm>
-            <a:off x="8503920" y="137160"/>
-            <a:ext cx="457200" cy="457200"/>
-          </a:xfrm>
-          <a:prstGeom prst="rect">
-            <a:avLst/>
-          </a:prstGeom>
-          <a:noFill/>
-          <a:ln/>
-        </p:spPr>
-        <p:txBody>
-          <a:bodyPr wrap="square" rtlCol="0" anchor="ctr"/>
-          <a:lstStyle/>
-          <a:p>
-            <a:pPr marL="0" indent="0" algn="ctr">
-              <a:buNone/>
-            </a:pPr>
-            <a:r>
-              <a:rPr lang="en-US" sz="1800" b="1" dirty="0">
-                <a:solidFill>
-                  <a:srgbClr val="FFFFFF"/>
-                </a:solidFill>
-              </a:rPr>
-              <a:t>✦</a:t>
-            </a:r>
-            <a:endParaRPr lang="en-US" sz="1800" dirty="0"/>
-          </a:p>
-        </p:txBody>
-      </p:sp>
-      <p:sp>
-        <p:nvSpPr>
-          <p:cNvPr id="5" name="Text 3"/>
-          <p:cNvSpPr/>
-          <p:nvPr/>
-        </p:nvSpPr>
-        <p:spPr>
-          <a:xfrm>
-            <a:off x="411480" y="201168"/>
-            <a:ext cx="8046720" cy="640080"/>
-          </a:xfrm>
-          <a:prstGeom prst="rect">
-            <a:avLst/>
-          </a:prstGeom>
-          <a:noFill/>
-          <a:ln/>
-        </p:spPr>
-        <p:txBody>
-          <a:bodyPr wrap="square" lIns="0" tIns="0" rIns="0" bIns="0" rtlCol="0" anchor="ctr"/>
-          <a:lstStyle/>
-          <a:p>
-            <a:pPr marL="0" indent="0" algn="l">
-              <a:buNone/>
-            </a:pPr>
-            <a:r>
-              <a:rPr lang="en-US" sz="3200" b="1" dirty="0">
-                <a:solidFill>
-                  <a:srgbClr val="A78BFA"/>
-                </a:solidFill>
-                <a:latin typeface="Calibri" pitchFamily="34" charset="0"/>
-                <a:ea typeface="Calibri" pitchFamily="34" charset="-122"/>
-                <a:cs typeface="Calibri" pitchFamily="34" charset="-120"/>
-              </a:rPr>
-              <a:t>Literature Review (Continued)</a:t>
-            </a:r>
-            <a:endParaRPr lang="en-US" sz="3200" dirty="0"/>
-          </a:p>
-        </p:txBody>
-      </p:sp>
-      <p:sp>
-        <p:nvSpPr>
-          <p:cNvPr id="6" name="Shape 4"/>
-          <p:cNvSpPr/>
-          <p:nvPr/>
-        </p:nvSpPr>
-        <p:spPr>
-          <a:xfrm>
-            <a:off x="411480" y="841248"/>
-            <a:ext cx="2286000" cy="36576"/>
-          </a:xfrm>
-          <a:prstGeom prst="rect">
-            <a:avLst/>
-          </a:prstGeom>
-          <a:solidFill>
-            <a:srgbClr val="7C3AED">
-              <a:alpha val="60000"/>
-            </a:srgbClr>
-          </a:solidFill>
-          <a:ln w="12700">
-            <a:solidFill>
-              <a:srgbClr val="7C3AED">
-                <a:alpha val="0"/>
-              </a:srgbClr>
-            </a:solidFill>
-            <a:prstDash val="solid"/>
-          </a:ln>
-        </p:spPr>
-      </p:sp>
-      <p:sp>
-        <p:nvSpPr>
-          <p:cNvPr id="7" name="Text 5"/>
-          <p:cNvSpPr/>
-          <p:nvPr/>
-        </p:nvSpPr>
-        <p:spPr>
-          <a:xfrm>
-            <a:off x="411480" y="1005840"/>
-            <a:ext cx="8321040" cy="3931920"/>
-          </a:xfrm>
-          <a:prstGeom prst="rect">
-            <a:avLst/>
-          </a:prstGeom>
-          <a:noFill/>
-          <a:ln/>
-        </p:spPr>
-        <p:txBody>
-          <a:bodyPr wrap="square" lIns="0" tIns="0" rIns="0" bIns="0" rtlCol="0" anchor="t"/>
-          <a:lstStyle/>
-          <a:p>
-            <a:pPr marL="342900" indent="-342900">
-              <a:spcAft>
-                <a:spcPts val="1000"/>
-              </a:spcAft>
-              <a:buSzPct val="100000"/>
-              <a:buChar char="•"/>
-            </a:pPr>
-            <a:endParaRPr lang="en-US" sz="1350" dirty="0">
-              <a:solidFill>
-                <a:srgbClr val="FFFFFF"/>
-              </a:solidFill>
-              <a:latin typeface="Calibri" pitchFamily="34" charset="0"/>
-              <a:ea typeface="Calibri" pitchFamily="34" charset="-122"/>
-              <a:cs typeface="Calibri" pitchFamily="34" charset="-120"/>
-            </a:endParaRPr>
-          </a:p>
-          <a:p>
-            <a:pPr marL="342900" indent="-342900">
-              <a:spcAft>
-                <a:spcPts val="1000"/>
-              </a:spcAft>
-              <a:buSzPct val="100000"/>
-              <a:buChar char="•"/>
-            </a:pPr>
-            <a:r>
-              <a:rPr lang="en-US" sz="1350" dirty="0">
-                <a:solidFill>
-                  <a:srgbClr val="FFFFFF"/>
-                </a:solidFill>
-                <a:latin typeface="Calibri" pitchFamily="34" charset="0"/>
-                <a:ea typeface="Calibri" pitchFamily="34" charset="-122"/>
-                <a:cs typeface="Calibri" pitchFamily="34" charset="-120"/>
-              </a:rPr>
-              <a:t>[5] Hudak (2000) — The Haskell School of Expression: Demonstrated how functional programming and algebraic data types can model real-world domain problems compositionally.</a:t>
-            </a:r>
-            <a:endParaRPr lang="en-US" sz="1350" dirty="0"/>
-          </a:p>
-          <a:p>
-            <a:pPr marL="342900" indent="-342900">
-              <a:spcAft>
-                <a:spcPts val="1000"/>
-              </a:spcAft>
-              <a:buSzPct val="100000"/>
-              <a:buChar char="•"/>
-            </a:pPr>
-            <a:r>
-              <a:rPr lang="en-US" sz="1350" dirty="0">
-                <a:solidFill>
-                  <a:srgbClr val="FFFFFF"/>
-                </a:solidFill>
-                <a:latin typeface="Calibri" pitchFamily="34" charset="0"/>
-                <a:ea typeface="Calibri" pitchFamily="34" charset="-122"/>
-                <a:cs typeface="Calibri" pitchFamily="34" charset="-120"/>
-              </a:rPr>
-              <a:t>[6] O'Sullivan et al. (2008) — Real World Haskell: Showed practical Haskell applications for data parsing, IO handling, and modular program design.</a:t>
-            </a:r>
-            <a:endParaRPr lang="en-US" sz="1350" dirty="0"/>
-          </a:p>
-          <a:p>
-            <a:pPr marL="342900" indent="-342900">
-              <a:spcAft>
-                <a:spcPts val="1000"/>
-              </a:spcAft>
-              <a:buSzPct val="100000"/>
-              <a:buChar char="•"/>
-            </a:pPr>
-            <a:r>
-              <a:rPr lang="en-US" sz="1350" dirty="0">
-                <a:solidFill>
-                  <a:srgbClr val="FFFFFF"/>
-                </a:solidFill>
-                <a:latin typeface="Calibri" pitchFamily="34" charset="0"/>
-                <a:ea typeface="Calibri" pitchFamily="34" charset="-122"/>
-                <a:cs typeface="Calibri" pitchFamily="34" charset="-120"/>
-              </a:rPr>
-              <a:t>[7] Pollet et al. (2019) — Dashboard Design for Climate Data: Studied effective visualization strategies for emission data using interactive charts.</a:t>
-            </a:r>
-            <a:endParaRPr lang="en-US" sz="1350" dirty="0"/>
-          </a:p>
-          <a:p>
-            <a:pPr marL="342900" indent="-342900">
-              <a:spcAft>
-                <a:spcPts val="1000"/>
-              </a:spcAft>
-              <a:buSzPct val="100000"/>
-              <a:buChar char="•"/>
-            </a:pPr>
-            <a:r>
-              <a:rPr lang="en-US" sz="1350" dirty="0">
-                <a:solidFill>
-                  <a:srgbClr val="FFFFFF"/>
-                </a:solidFill>
-                <a:latin typeface="Calibri" pitchFamily="34" charset="0"/>
-                <a:ea typeface="Calibri" pitchFamily="34" charset="-122"/>
-                <a:cs typeface="Calibri" pitchFamily="34" charset="-120"/>
-              </a:rPr>
-              <a:t>[8] Meta AI (2024) — Llama 3: Open Foundation Models: Introduced the Llama 3 LLM architecture used for context-grounded conversational AI in analytics systems.</a:t>
-            </a:r>
-            <a:endParaRPr lang="en-US" sz="1350" dirty="0"/>
-          </a:p>
-        </p:txBody>
-      </p:sp>
-    </p:spTree>
-  </p:cSld>
-  <p:clrMapOvr>
-    <a:masterClrMapping/>
-  </p:clrMapOvr>
-  <mc:AlternateContent xmlns:mc="http://schemas.openxmlformats.org/markup-compatibility/2006" xmlns:p14="http://schemas.microsoft.com/office/powerpoint/2010/main">
-    <mc:Choice Requires="p14">
-      <p:transition spd="med" p14:dur="700">
-        <p:fade/>
-      </p:transition>
-    </mc:Choice>
-    <mc:Fallback xmlns="">
-      <p:transition spd="med">
-        <p:fade/>
-      </p:transition>
-    </mc:Fallback>
-  </mc:AlternateContent>
-</p:sld>
-</file>
-
-<file path=ppt/slides/slide8.xml><?xml version="1.0" encoding="utf-8"?>
 <p:sld xmlns:a="http://schemas.openxmlformats.org/drawingml/2006/main" xmlns:r="http://schemas.openxmlformats.org/officeDocument/2006/relationships" xmlns:p="http://schemas.openxmlformats.org/presentationml/2006/main">
   <p:cSld name="Slide 8">
     <p:bg>
@@ -7147,6 +6385,394 @@
               <a:t>Most transport analytics platforms use bloated JS frameworks — there is no demonstrated use of Haskell for a production emission analytics engine.</a:t>
             </a:r>
             <a:endParaRPr lang="en-US" sz="1400" dirty="0"/>
+          </a:p>
+        </p:txBody>
+      </p:sp>
+    </p:spTree>
+  </p:cSld>
+  <p:clrMapOvr>
+    <a:masterClrMapping/>
+  </p:clrMapOvr>
+  <mc:AlternateContent xmlns:mc="http://schemas.openxmlformats.org/markup-compatibility/2006" xmlns:p14="http://schemas.microsoft.com/office/powerpoint/2010/main">
+    <mc:Choice Requires="p14">
+      <p:transition spd="med" p14:dur="700">
+        <p:fade/>
+      </p:transition>
+    </mc:Choice>
+    <mc:Fallback xmlns="">
+      <p:transition spd="med">
+        <p:fade/>
+      </p:transition>
+    </mc:Fallback>
+  </mc:AlternateContent>
+</p:sld>
+</file>
+
+<file path=ppt/slides/slide8.xml><?xml version="1.0" encoding="utf-8"?>
+<p:sld xmlns:a="http://schemas.openxmlformats.org/drawingml/2006/main" xmlns:r="http://schemas.openxmlformats.org/officeDocument/2006/relationships" xmlns:p="http://schemas.openxmlformats.org/presentationml/2006/main">
+  <p:cSld name="Slide 11">
+    <p:bg>
+      <p:bgPr>
+        <a:solidFill>
+          <a:srgbClr val="050814"/>
+        </a:solidFill>
+        <a:effectLst/>
+      </p:bgPr>
+    </p:bg>
+    <p:spTree>
+      <p:nvGrpSpPr>
+        <p:cNvPr id="1" name=""/>
+        <p:cNvGrpSpPr/>
+        <p:nvPr/>
+      </p:nvGrpSpPr>
+      <p:grpSpPr>
+        <a:xfrm>
+          <a:off x="0" y="0"/>
+          <a:ext cx="0" cy="0"/>
+          <a:chOff x="0" y="0"/>
+          <a:chExt cx="0" cy="0"/>
+        </a:xfrm>
+      </p:grpSpPr>
+      <p:sp>
+        <p:nvSpPr>
+          <p:cNvPr id="2" name="Shape 0"/>
+          <p:cNvSpPr/>
+          <p:nvPr/>
+        </p:nvSpPr>
+        <p:spPr>
+          <a:xfrm>
+            <a:off x="-914400" y="3200400"/>
+            <a:ext cx="4572000" cy="3200400"/>
+          </a:xfrm>
+          <a:prstGeom prst="ellipse">
+            <a:avLst/>
+          </a:prstGeom>
+          <a:solidFill>
+            <a:srgbClr val="4C1D95">
+              <a:alpha val="25000"/>
+            </a:srgbClr>
+          </a:solidFill>
+          <a:ln w="12700">
+            <a:solidFill>
+              <a:srgbClr val="4C1D95">
+                <a:alpha val="0"/>
+              </a:srgbClr>
+            </a:solidFill>
+            <a:prstDash val="solid"/>
+          </a:ln>
+        </p:spPr>
+      </p:sp>
+      <p:sp>
+        <p:nvSpPr>
+          <p:cNvPr id="3" name="Shape 1"/>
+          <p:cNvSpPr/>
+          <p:nvPr/>
+        </p:nvSpPr>
+        <p:spPr>
+          <a:xfrm>
+            <a:off x="6858000" y="2743200"/>
+            <a:ext cx="3657600" cy="2743200"/>
+          </a:xfrm>
+          <a:prstGeom prst="ellipse">
+            <a:avLst/>
+          </a:prstGeom>
+          <a:solidFill>
+            <a:srgbClr val="1E1B4B">
+              <a:alpha val="40000"/>
+            </a:srgbClr>
+          </a:solidFill>
+          <a:ln w="12700">
+            <a:solidFill>
+              <a:srgbClr val="1E1B4B">
+                <a:alpha val="0"/>
+              </a:srgbClr>
+            </a:solidFill>
+            <a:prstDash val="solid"/>
+          </a:ln>
+        </p:spPr>
+      </p:sp>
+      <p:sp>
+        <p:nvSpPr>
+          <p:cNvPr id="4" name="Text 2"/>
+          <p:cNvSpPr/>
+          <p:nvPr/>
+        </p:nvSpPr>
+        <p:spPr>
+          <a:xfrm>
+            <a:off x="8503920" y="137160"/>
+            <a:ext cx="457200" cy="457200"/>
+          </a:xfrm>
+          <a:prstGeom prst="rect">
+            <a:avLst/>
+          </a:prstGeom>
+          <a:noFill/>
+          <a:ln/>
+        </p:spPr>
+        <p:txBody>
+          <a:bodyPr wrap="square" rtlCol="0" anchor="ctr"/>
+          <a:lstStyle/>
+          <a:p>
+            <a:pPr marL="0" indent="0" algn="ctr">
+              <a:buNone/>
+            </a:pPr>
+            <a:r>
+              <a:rPr lang="en-US" sz="1800" b="1" dirty="0">
+                <a:solidFill>
+                  <a:srgbClr val="FFFFFF"/>
+                </a:solidFill>
+              </a:rPr>
+              <a:t>✦</a:t>
+            </a:r>
+            <a:endParaRPr lang="en-US" sz="1800" dirty="0"/>
+          </a:p>
+        </p:txBody>
+      </p:sp>
+      <p:sp>
+        <p:nvSpPr>
+          <p:cNvPr id="5" name="Text 3"/>
+          <p:cNvSpPr/>
+          <p:nvPr/>
+        </p:nvSpPr>
+        <p:spPr>
+          <a:xfrm>
+            <a:off x="411480" y="201168"/>
+            <a:ext cx="8046720" cy="640080"/>
+          </a:xfrm>
+          <a:prstGeom prst="rect">
+            <a:avLst/>
+          </a:prstGeom>
+          <a:noFill/>
+          <a:ln/>
+        </p:spPr>
+        <p:txBody>
+          <a:bodyPr wrap="square" lIns="0" tIns="0" rIns="0" bIns="0" rtlCol="0" anchor="ctr"/>
+          <a:lstStyle/>
+          <a:p>
+            <a:pPr marL="0" indent="0" algn="l">
+              <a:buNone/>
+            </a:pPr>
+            <a:r>
+              <a:rPr lang="en-US" sz="3200" b="1" dirty="0">
+                <a:solidFill>
+                  <a:srgbClr val="A78BFA"/>
+                </a:solidFill>
+                <a:latin typeface="Calibri" pitchFamily="34" charset="0"/>
+                <a:ea typeface="Calibri" pitchFamily="34" charset="-122"/>
+                <a:cs typeface="Calibri" pitchFamily="34" charset="-120"/>
+              </a:rPr>
+              <a:t>Contributions</a:t>
+            </a:r>
+            <a:endParaRPr lang="en-US" sz="3200" dirty="0"/>
+          </a:p>
+        </p:txBody>
+      </p:sp>
+      <p:sp>
+        <p:nvSpPr>
+          <p:cNvPr id="6" name="Shape 4"/>
+          <p:cNvSpPr/>
+          <p:nvPr/>
+        </p:nvSpPr>
+        <p:spPr>
+          <a:xfrm>
+            <a:off x="411480" y="841248"/>
+            <a:ext cx="2286000" cy="36576"/>
+          </a:xfrm>
+          <a:prstGeom prst="rect">
+            <a:avLst/>
+          </a:prstGeom>
+          <a:solidFill>
+            <a:srgbClr val="7C3AED">
+              <a:alpha val="60000"/>
+            </a:srgbClr>
+          </a:solidFill>
+          <a:ln w="12700">
+            <a:solidFill>
+              <a:srgbClr val="7C3AED">
+                <a:alpha val="0"/>
+              </a:srgbClr>
+            </a:solidFill>
+            <a:prstDash val="solid"/>
+          </a:ln>
+        </p:spPr>
+      </p:sp>
+      <p:sp>
+        <p:nvSpPr>
+          <p:cNvPr id="7" name="Text 5"/>
+          <p:cNvSpPr/>
+          <p:nvPr/>
+        </p:nvSpPr>
+        <p:spPr>
+          <a:xfrm>
+            <a:off x="411480" y="1005840"/>
+            <a:ext cx="8321040" cy="3931920"/>
+          </a:xfrm>
+          <a:prstGeom prst="rect">
+            <a:avLst/>
+          </a:prstGeom>
+          <a:noFill/>
+          <a:ln/>
+        </p:spPr>
+        <p:txBody>
+          <a:bodyPr wrap="square" lIns="0" tIns="0" rIns="0" bIns="0" rtlCol="0" anchor="t"/>
+          <a:lstStyle/>
+          <a:p>
+            <a:pPr marL="342900" indent="-342900">
+              <a:buSzPct val="100000"/>
+              <a:buChar char="•"/>
+            </a:pPr>
+            <a:endParaRPr lang="en-US" sz="1350" b="1" dirty="0">
+              <a:solidFill>
+                <a:srgbClr val="C4B5FD"/>
+              </a:solidFill>
+              <a:latin typeface="Calibri" pitchFamily="34" charset="0"/>
+              <a:ea typeface="Calibri" pitchFamily="34" charset="-122"/>
+              <a:cs typeface="Calibri" pitchFamily="34" charset="-120"/>
+            </a:endParaRPr>
+          </a:p>
+          <a:p>
+            <a:pPr marL="342900" indent="-342900">
+              <a:buSzPct val="100000"/>
+              <a:buChar char="•"/>
+            </a:pPr>
+            <a:r>
+              <a:rPr lang="en-US" sz="1350" b="1" dirty="0">
+                <a:solidFill>
+                  <a:srgbClr val="C4B5FD"/>
+                </a:solidFill>
+                <a:latin typeface="Calibri" pitchFamily="34" charset="0"/>
+                <a:ea typeface="Calibri" pitchFamily="34" charset="-122"/>
+                <a:cs typeface="Calibri" pitchFamily="34" charset="-120"/>
+              </a:rPr>
+              <a:t>Haskell Backend: </a:t>
+            </a:r>
+            <a:r>
+              <a:rPr lang="en-US" sz="1350" dirty="0">
+                <a:solidFill>
+                  <a:srgbClr val="FFFFFF"/>
+                </a:solidFill>
+                <a:latin typeface="Calibri" pitchFamily="34" charset="0"/>
+                <a:ea typeface="Calibri" pitchFamily="34" charset="-122"/>
+                <a:cs typeface="Calibri" pitchFamily="34" charset="-120"/>
+              </a:rPr>
+              <a:t>18 source modules (~35,000+ bytes) of pure functional code — HOFs, ADTs, pattern matching, guards for composable emission modeling.</a:t>
+            </a:r>
+            <a:endParaRPr lang="en-US" sz="1350" dirty="0"/>
+          </a:p>
+          <a:p>
+            <a:pPr marL="342900" indent="-342900">
+              <a:buSzPct val="100000"/>
+              <a:buChar char="•"/>
+            </a:pPr>
+            <a:r>
+              <a:rPr lang="en-US" sz="1350" b="1" dirty="0">
+                <a:solidFill>
+                  <a:srgbClr val="C4B5FD"/>
+                </a:solidFill>
+                <a:latin typeface="Calibri" pitchFamily="34" charset="0"/>
+                <a:ea typeface="Calibri" pitchFamily="34" charset="-122"/>
+                <a:cs typeface="Calibri" pitchFamily="34" charset="-120"/>
+              </a:rPr>
+              <a:t>Global Dashboard: </a:t>
+            </a:r>
+            <a:r>
+              <a:rPr lang="en-US" sz="1350" dirty="0">
+                <a:solidFill>
+                  <a:srgbClr val="FFFFFF"/>
+                </a:solidFill>
+                <a:latin typeface="Calibri" pitchFamily="34" charset="0"/>
+                <a:ea typeface="Calibri" pitchFamily="34" charset="-122"/>
+                <a:cs typeface="Calibri" pitchFamily="34" charset="-120"/>
+              </a:rPr>
+              <a:t>196 countries × 16 years · 8 interactive pages · 20+ Chart.js visualizations · theme-aware adaptive color rendering.</a:t>
+            </a:r>
+            <a:endParaRPr lang="en-US" sz="1350" dirty="0"/>
+          </a:p>
+          <a:p>
+            <a:pPr marL="342900" indent="-342900">
+              <a:buSzPct val="100000"/>
+              <a:buChar char="•"/>
+            </a:pPr>
+            <a:r>
+              <a:rPr lang="en-US" sz="1350" b="1" dirty="0">
+                <a:solidFill>
+                  <a:srgbClr val="C4B5FD"/>
+                </a:solidFill>
+                <a:latin typeface="Calibri" pitchFamily="34" charset="0"/>
+                <a:ea typeface="Calibri" pitchFamily="34" charset="-122"/>
+                <a:cs typeface="Calibri" pitchFamily="34" charset="-120"/>
+              </a:rPr>
+              <a:t>Policy Simulation: </a:t>
+            </a:r>
+            <a:r>
+              <a:rPr lang="en-US" sz="1350" dirty="0">
+                <a:solidFill>
+                  <a:srgbClr val="FFFFFF"/>
+                </a:solidFill>
+                <a:latin typeface="Calibri" pitchFamily="34" charset="0"/>
+                <a:ea typeface="Calibri" pitchFamily="34" charset="-122"/>
+                <a:cs typeface="Calibri" pitchFamily="34" charset="-120"/>
+              </a:rPr>
+              <a:t>5 scenarios (Rail Push, EV Transition, Active Mobility, Bus Rapid Transit, Zero Car City) with automated CO₂ reduction calculation.</a:t>
+            </a:r>
+            <a:endParaRPr lang="en-US" sz="1350" dirty="0"/>
+          </a:p>
+          <a:p>
+            <a:pPr marL="342900" indent="-342900">
+              <a:buSzPct val="100000"/>
+              <a:buChar char="•"/>
+            </a:pPr>
+            <a:r>
+              <a:rPr lang="en-US" sz="1350" b="1" dirty="0">
+                <a:solidFill>
+                  <a:srgbClr val="C4B5FD"/>
+                </a:solidFill>
+                <a:latin typeface="Calibri" pitchFamily="34" charset="0"/>
+                <a:ea typeface="Calibri" pitchFamily="34" charset="-122"/>
+                <a:cs typeface="Calibri" pitchFamily="34" charset="-120"/>
+              </a:rPr>
+              <a:t>Context-Grounded AI: </a:t>
+            </a:r>
+            <a:r>
+              <a:rPr lang="en-US" sz="1350" dirty="0">
+                <a:solidFill>
+                  <a:srgbClr val="FFFFFF"/>
+                </a:solidFill>
+                <a:latin typeface="Calibri" pitchFamily="34" charset="0"/>
+                <a:ea typeface="Calibri" pitchFamily="34" charset="-122"/>
+                <a:cs typeface="Calibri" pitchFamily="34" charset="-120"/>
+              </a:rPr>
+              <a:t>Compressed dataset payload injected into Llama 3.1 system prompt — ensuring zero-hallucination, data-specific chatbot responses.</a:t>
+            </a:r>
+            <a:endParaRPr lang="en-US" sz="1350" dirty="0"/>
+          </a:p>
+          <a:p>
+            <a:pPr marL="342900" indent="-342900">
+              <a:buSzPct val="100000"/>
+              <a:buChar char="•"/>
+            </a:pPr>
+            <a:r>
+              <a:rPr lang="en-US" sz="1350" b="1" dirty="0">
+                <a:solidFill>
+                  <a:srgbClr val="C4B5FD"/>
+                </a:solidFill>
+                <a:latin typeface="Calibri" pitchFamily="34" charset="0"/>
+                <a:ea typeface="Calibri" pitchFamily="34" charset="-122"/>
+                <a:cs typeface="Calibri" pitchFamily="34" charset="-120"/>
+              </a:rPr>
+              <a:t>Custom Forecasting + Import: </a:t>
+            </a:r>
+            <a:r>
+              <a:rPr lang="en-US" sz="1350" dirty="0">
+                <a:solidFill>
+                  <a:srgbClr val="FFFFFF"/>
+                </a:solidFill>
+                <a:latin typeface="Calibri" pitchFamily="34" charset="0"/>
+                <a:ea typeface="Calibri" pitchFamily="34" charset="-122"/>
+                <a:cs typeface="Calibri" pitchFamily="34" charset="-120"/>
+              </a:rPr>
+              <a:t>From-scratch linear regression engine (trends to 2035) and drag-and-drop dataset importer with CSV-to-JSON converter.</a:t>
+            </a:r>
+            <a:endParaRPr lang="en-US" sz="1350" dirty="0"/>
           </a:p>
         </p:txBody>
       </p:sp>

--- a/documentation/TransportSense_PFL.pptx
+++ b/documentation/TransportSense_PFL.pptx
@@ -3059,39 +3059,6 @@
               </a:rPr>
             </a:br>
             <a:r>
-              <a:rPr lang="en-US" sz="1200" dirty="0">
-                <a:solidFill>
-                  <a:srgbClr val="C4B5FD"/>
-                </a:solidFill>
-                <a:latin typeface="Calibri" pitchFamily="34" charset="0"/>
-                <a:ea typeface="Calibri" pitchFamily="34" charset="-122"/>
-                <a:cs typeface="Calibri" pitchFamily="34" charset="-120"/>
-              </a:rPr>
-              <a:t>Scotty -&gt; </a:t>
-            </a:r>
-            <a:r>
-              <a:rPr lang="en-US" sz="1200" dirty="0" err="1">
-                <a:solidFill>
-                  <a:srgbClr val="C4B5FD"/>
-                </a:solidFill>
-                <a:latin typeface="Calibri" pitchFamily="34" charset="0"/>
-                <a:ea typeface="Calibri" pitchFamily="34" charset="-122"/>
-                <a:cs typeface="Calibri" pitchFamily="34" charset="-120"/>
-              </a:rPr>
-              <a:t>Js</a:t>
-            </a:r>
-            <a:r>
-              <a:rPr lang="en-US" sz="1200" dirty="0">
-                <a:solidFill>
-                  <a:srgbClr val="C4B5FD"/>
-                </a:solidFill>
-                <a:latin typeface="Calibri" pitchFamily="34" charset="0"/>
-                <a:ea typeface="Calibri" pitchFamily="34" charset="-122"/>
-                <a:cs typeface="Calibri" pitchFamily="34" charset="-120"/>
-              </a:rPr>
-              <a:t> -&gt; </a:t>
-            </a:r>
-            <a:r>
               <a:rPr lang="en-US" sz="1200" dirty="0" err="1">
                 <a:solidFill>
                   <a:srgbClr val="C4B5FD"/>
@@ -6620,7 +6587,7 @@
               <a:buSzPct val="100000"/>
               <a:buChar char="•"/>
             </a:pPr>
-            <a:endParaRPr lang="en-US" sz="1350" b="1" dirty="0">
+            <a:endParaRPr lang="en-US" sz="1400" b="1" dirty="0">
               <a:solidFill>
                 <a:srgbClr val="C4B5FD"/>
               </a:solidFill>
@@ -6635,7 +6602,7 @@
               <a:buChar char="•"/>
             </a:pPr>
             <a:r>
-              <a:rPr lang="en-US" sz="1350" b="1" dirty="0">
+              <a:rPr lang="en-US" sz="1400" b="1" dirty="0">
                 <a:solidFill>
                   <a:srgbClr val="C4B5FD"/>
                 </a:solidFill>
@@ -6646,7 +6613,7 @@
               <a:t>Haskell Backend: </a:t>
             </a:r>
             <a:r>
-              <a:rPr lang="en-US" sz="1350" dirty="0">
+              <a:rPr lang="en-US" sz="1400" dirty="0">
                 <a:solidFill>
                   <a:srgbClr val="FFFFFF"/>
                 </a:solidFill>
@@ -6656,36 +6623,13 @@
               </a:rPr>
               <a:t>18 source modules (~35,000+ bytes) of pure functional code — HOFs, ADTs, pattern matching, guards for composable emission modeling.</a:t>
             </a:r>
-            <a:endParaRPr lang="en-US" sz="1350" dirty="0"/>
           </a:p>
           <a:p>
             <a:pPr marL="342900" indent="-342900">
               <a:buSzPct val="100000"/>
               <a:buChar char="•"/>
             </a:pPr>
-            <a:r>
-              <a:rPr lang="en-US" sz="1350" b="1" dirty="0">
-                <a:solidFill>
-                  <a:srgbClr val="C4B5FD"/>
-                </a:solidFill>
-                <a:latin typeface="Calibri" pitchFamily="34" charset="0"/>
-                <a:ea typeface="Calibri" pitchFamily="34" charset="-122"/>
-                <a:cs typeface="Calibri" pitchFamily="34" charset="-120"/>
-              </a:rPr>
-              <a:t>Global Dashboard: </a:t>
-            </a:r>
-            <a:r>
-              <a:rPr lang="en-US" sz="1350" dirty="0">
-                <a:solidFill>
-                  <a:srgbClr val="FFFFFF"/>
-                </a:solidFill>
-                <a:latin typeface="Calibri" pitchFamily="34" charset="0"/>
-                <a:ea typeface="Calibri" pitchFamily="34" charset="-122"/>
-                <a:cs typeface="Calibri" pitchFamily="34" charset="-120"/>
-              </a:rPr>
-              <a:t>196 countries × 16 years · 8 interactive pages · 20+ Chart.js visualizations · theme-aware adaptive color rendering.</a:t>
-            </a:r>
-            <a:endParaRPr lang="en-US" sz="1350" dirty="0"/>
+            <a:endParaRPr lang="en-US" sz="1400" dirty="0"/>
           </a:p>
           <a:p>
             <a:pPr marL="342900" indent="-342900">
@@ -6693,7 +6637,7 @@
               <a:buChar char="•"/>
             </a:pPr>
             <a:r>
-              <a:rPr lang="en-US" sz="1350" b="1" dirty="0">
+              <a:rPr lang="en-US" sz="1400" b="1" dirty="0">
                 <a:solidFill>
                   <a:srgbClr val="C4B5FD"/>
                 </a:solidFill>
@@ -6701,10 +6645,10 @@
                 <a:ea typeface="Calibri" pitchFamily="34" charset="-122"/>
                 <a:cs typeface="Calibri" pitchFamily="34" charset="-120"/>
               </a:rPr>
-              <a:t>Policy Simulation: </a:t>
-            </a:r>
-            <a:r>
-              <a:rPr lang="en-US" sz="1350" dirty="0">
+              <a:t>Global Dashboard: </a:t>
+            </a:r>
+            <a:r>
+              <a:rPr lang="en-US" sz="1400" dirty="0">
                 <a:solidFill>
                   <a:srgbClr val="FFFFFF"/>
                 </a:solidFill>
@@ -6712,38 +6656,15 @@
                 <a:ea typeface="Calibri" pitchFamily="34" charset="-122"/>
                 <a:cs typeface="Calibri" pitchFamily="34" charset="-120"/>
               </a:rPr>
-              <a:t>5 scenarios (Rail Push, EV Transition, Active Mobility, Bus Rapid Transit, Zero Car City) with automated CO₂ reduction calculation.</a:t>
-            </a:r>
-            <a:endParaRPr lang="en-US" sz="1350" dirty="0"/>
+              <a:t>196 countries × 16 years · 8 interactive pages · 20+ Chart.js visualizations · theme-aware adaptive color rendering.</a:t>
+            </a:r>
           </a:p>
           <a:p>
             <a:pPr marL="342900" indent="-342900">
               <a:buSzPct val="100000"/>
               <a:buChar char="•"/>
             </a:pPr>
-            <a:r>
-              <a:rPr lang="en-US" sz="1350" b="1" dirty="0">
-                <a:solidFill>
-                  <a:srgbClr val="C4B5FD"/>
-                </a:solidFill>
-                <a:latin typeface="Calibri" pitchFamily="34" charset="0"/>
-                <a:ea typeface="Calibri" pitchFamily="34" charset="-122"/>
-                <a:cs typeface="Calibri" pitchFamily="34" charset="-120"/>
-              </a:rPr>
-              <a:t>Context-Grounded AI: </a:t>
-            </a:r>
-            <a:r>
-              <a:rPr lang="en-US" sz="1350" dirty="0">
-                <a:solidFill>
-                  <a:srgbClr val="FFFFFF"/>
-                </a:solidFill>
-                <a:latin typeface="Calibri" pitchFamily="34" charset="0"/>
-                <a:ea typeface="Calibri" pitchFamily="34" charset="-122"/>
-                <a:cs typeface="Calibri" pitchFamily="34" charset="-120"/>
-              </a:rPr>
-              <a:t>Compressed dataset payload injected into Llama 3.1 system prompt — ensuring zero-hallucination, data-specific chatbot responses.</a:t>
-            </a:r>
-            <a:endParaRPr lang="en-US" sz="1350" dirty="0"/>
+            <a:endParaRPr lang="en-US" sz="1400" dirty="0"/>
           </a:p>
           <a:p>
             <a:pPr marL="342900" indent="-342900">
@@ -6751,7 +6672,7 @@
               <a:buChar char="•"/>
             </a:pPr>
             <a:r>
-              <a:rPr lang="en-US" sz="1350" b="1" dirty="0">
+              <a:rPr lang="en-US" sz="1400" b="1" dirty="0">
                 <a:solidFill>
                   <a:srgbClr val="C4B5FD"/>
                 </a:solidFill>
@@ -6759,10 +6680,45 @@
                 <a:ea typeface="Calibri" pitchFamily="34" charset="-122"/>
                 <a:cs typeface="Calibri" pitchFamily="34" charset="-120"/>
               </a:rPr>
+              <a:t>Context-Grounded AI: </a:t>
+            </a:r>
+            <a:r>
+              <a:rPr lang="en-US" sz="1400" dirty="0">
+                <a:solidFill>
+                  <a:srgbClr val="FFFFFF"/>
+                </a:solidFill>
+                <a:latin typeface="Calibri" pitchFamily="34" charset="0"/>
+                <a:ea typeface="Calibri" pitchFamily="34" charset="-122"/>
+                <a:cs typeface="Calibri" pitchFamily="34" charset="-120"/>
+              </a:rPr>
+              <a:t>Compressed dataset payload injected into Llama 3.1 system prompt — ensuring zero-hallucination, data-specific chatbot responses.</a:t>
+            </a:r>
+          </a:p>
+          <a:p>
+            <a:pPr marL="342900" indent="-342900">
+              <a:buSzPct val="100000"/>
+              <a:buChar char="•"/>
+            </a:pPr>
+            <a:endParaRPr lang="en-US" sz="1400" dirty="0"/>
+          </a:p>
+          <a:p>
+            <a:pPr marL="342900" indent="-342900">
+              <a:buSzPct val="100000"/>
+              <a:buChar char="•"/>
+            </a:pPr>
+            <a:r>
+              <a:rPr lang="en-US" sz="1400" b="1" dirty="0">
+                <a:solidFill>
+                  <a:srgbClr val="C4B5FD"/>
+                </a:solidFill>
+                <a:latin typeface="Calibri" pitchFamily="34" charset="0"/>
+                <a:ea typeface="Calibri" pitchFamily="34" charset="-122"/>
+                <a:cs typeface="Calibri" pitchFamily="34" charset="-120"/>
+              </a:rPr>
               <a:t>Custom Forecasting + Import: </a:t>
             </a:r>
             <a:r>
-              <a:rPr lang="en-US" sz="1350" dirty="0">
+              <a:rPr lang="en-US" sz="1400" dirty="0">
                 <a:solidFill>
                   <a:srgbClr val="FFFFFF"/>
                 </a:solidFill>
@@ -6772,7 +6728,7 @@
               </a:rPr>
               <a:t>From-scratch linear regression engine (trends to 2035) and drag-and-drop dataset importer with CSV-to-JSON converter.</a:t>
             </a:r>
-            <a:endParaRPr lang="en-US" sz="1350" dirty="0"/>
+            <a:endParaRPr lang="en-US" sz="1400" dirty="0"/>
           </a:p>
         </p:txBody>
       </p:sp>
@@ -7037,7 +6993,7 @@
                 <a:ea typeface="Calibri" pitchFamily="34" charset="-122"/>
                 <a:cs typeface="Calibri" pitchFamily="34" charset="-120"/>
               </a:rPr>
-              <a:t>First-of-its-kind use of Haskell and functional programming (HOFs, ADTs, pattern matching, functor/monoid abstractions) to build a modular emission calculation, sensitivity analysis, and policy simulation engine with 18 composable modules.</a:t>
+              <a:t>First-of-its-kind use of Haskell and functional programming (HOFs, ADTs, pattern matching, functor) to build a modular emission calculation, sensitivity analysis, and policy simulation engine with 18 composable modules.</a:t>
             </a:r>
             <a:endParaRPr lang="en-US" sz="1450" dirty="0"/>
           </a:p>
